--- a/Figures/Figure3.pptx
+++ b/Figures/Figure3.pptx
@@ -2,7 +2,7 @@
 <file path=ppt/presentation.xml><?xml version="1.0" encoding="utf-8"?>
 <p:presentation xmlns:a="http://schemas.openxmlformats.org/drawingml/2006/main" xmlns:r="http://schemas.openxmlformats.org/officeDocument/2006/relationships" xmlns:p="http://schemas.openxmlformats.org/presentationml/2006/main" saveSubsetFonts="1" autoCompressPictures="0">
   <p:sldMasterIdLst>
-    <p:sldMasterId id="2147483684" r:id="rId1"/>
+    <p:sldMasterId id="2147483708" r:id="rId1"/>
   </p:sldMasterIdLst>
   <p:notesMasterIdLst>
     <p:notesMasterId r:id="rId3"/>
@@ -10,7 +10,7 @@
   <p:sldIdLst>
     <p:sldId id="256" r:id="rId2"/>
   </p:sldIdLst>
-  <p:sldSz cx="5943600" cy="1828800"/>
+  <p:sldSz cx="11430000" cy="4114800"/>
   <p:notesSz cx="6858000" cy="9144000"/>
   <p:defaultTextStyle>
     <a:defPPr>
@@ -107,6 +107,11 @@
       </a:defRPr>
     </a:lvl9pPr>
   </p:defaultTextStyle>
+  <p:extLst>
+    <p:ext uri="{EFAFB233-063F-42B5-8137-9DF3F51BA10A}">
+      <p15:sldGuideLst xmlns:p15="http://schemas.microsoft.com/office/powerpoint/2012/main"/>
+    </p:ext>
+  </p:extLst>
 </p:presentation>
 </file>
 
@@ -192,7 +197,7 @@
           <a:p>
             <a:fld id="{395D7992-A232-6D40-BD97-6AB4FCF6A1B6}" type="datetimeFigureOut">
               <a:rPr lang="en-US" smtClean="0"/>
-              <a:t>8/13/26</a:t>
+              <a:t>9/3/26</a:t>
             </a:fld>
             <a:endParaRPr lang="en-US"/>
           </a:p>
@@ -210,8 +215,8 @@
         </p:nvSpPr>
         <p:spPr>
           <a:xfrm>
-            <a:off x="-1585913" y="1143000"/>
-            <a:ext cx="10029826" cy="3086100"/>
+            <a:off x="-857250" y="1143000"/>
+            <a:ext cx="8572500" cy="3086100"/>
           </a:xfrm>
           <a:prstGeom prst="rect">
             <a:avLst/>
@@ -365,8 +370,8 @@
   </p:cSld>
   <p:clrMap bg1="lt1" tx1="dk1" bg2="lt2" tx2="dk2" accent1="accent1" accent2="accent2" accent3="accent3" accent4="accent4" accent5="accent5" accent6="accent6" hlink="hlink" folHlink="folHlink"/>
   <p:notesStyle>
-    <a:lvl1pPr marL="0" algn="l" defTabSz="373075" rtl="0" eaLnBrk="1" latinLnBrk="0" hangingPunct="1">
-      <a:defRPr sz="490" kern="1200">
+    <a:lvl1pPr marL="0" algn="l" defTabSz="724810" rtl="0" eaLnBrk="1" latinLnBrk="0" hangingPunct="1">
+      <a:defRPr sz="952" kern="1200">
         <a:solidFill>
           <a:schemeClr val="tx1"/>
         </a:solidFill>
@@ -375,8 +380,8 @@
         <a:cs typeface="+mn-cs"/>
       </a:defRPr>
     </a:lvl1pPr>
-    <a:lvl2pPr marL="186538" algn="l" defTabSz="373075" rtl="0" eaLnBrk="1" latinLnBrk="0" hangingPunct="1">
-      <a:defRPr sz="490" kern="1200">
+    <a:lvl2pPr marL="362406" algn="l" defTabSz="724810" rtl="0" eaLnBrk="1" latinLnBrk="0" hangingPunct="1">
+      <a:defRPr sz="952" kern="1200">
         <a:solidFill>
           <a:schemeClr val="tx1"/>
         </a:solidFill>
@@ -385,8 +390,8 @@
         <a:cs typeface="+mn-cs"/>
       </a:defRPr>
     </a:lvl2pPr>
-    <a:lvl3pPr marL="373075" algn="l" defTabSz="373075" rtl="0" eaLnBrk="1" latinLnBrk="0" hangingPunct="1">
-      <a:defRPr sz="490" kern="1200">
+    <a:lvl3pPr marL="724810" algn="l" defTabSz="724810" rtl="0" eaLnBrk="1" latinLnBrk="0" hangingPunct="1">
+      <a:defRPr sz="952" kern="1200">
         <a:solidFill>
           <a:schemeClr val="tx1"/>
         </a:solidFill>
@@ -395,8 +400,8 @@
         <a:cs typeface="+mn-cs"/>
       </a:defRPr>
     </a:lvl3pPr>
-    <a:lvl4pPr marL="559613" algn="l" defTabSz="373075" rtl="0" eaLnBrk="1" latinLnBrk="0" hangingPunct="1">
-      <a:defRPr sz="490" kern="1200">
+    <a:lvl4pPr marL="1087216" algn="l" defTabSz="724810" rtl="0" eaLnBrk="1" latinLnBrk="0" hangingPunct="1">
+      <a:defRPr sz="952" kern="1200">
         <a:solidFill>
           <a:schemeClr val="tx1"/>
         </a:solidFill>
@@ -405,8 +410,8 @@
         <a:cs typeface="+mn-cs"/>
       </a:defRPr>
     </a:lvl4pPr>
-    <a:lvl5pPr marL="746150" algn="l" defTabSz="373075" rtl="0" eaLnBrk="1" latinLnBrk="0" hangingPunct="1">
-      <a:defRPr sz="490" kern="1200">
+    <a:lvl5pPr marL="1449620" algn="l" defTabSz="724810" rtl="0" eaLnBrk="1" latinLnBrk="0" hangingPunct="1">
+      <a:defRPr sz="952" kern="1200">
         <a:solidFill>
           <a:schemeClr val="tx1"/>
         </a:solidFill>
@@ -415,8 +420,8 @@
         <a:cs typeface="+mn-cs"/>
       </a:defRPr>
     </a:lvl5pPr>
-    <a:lvl6pPr marL="932688" algn="l" defTabSz="373075" rtl="0" eaLnBrk="1" latinLnBrk="0" hangingPunct="1">
-      <a:defRPr sz="490" kern="1200">
+    <a:lvl6pPr marL="1812026" algn="l" defTabSz="724810" rtl="0" eaLnBrk="1" latinLnBrk="0" hangingPunct="1">
+      <a:defRPr sz="952" kern="1200">
         <a:solidFill>
           <a:schemeClr val="tx1"/>
         </a:solidFill>
@@ -425,8 +430,8 @@
         <a:cs typeface="+mn-cs"/>
       </a:defRPr>
     </a:lvl6pPr>
-    <a:lvl7pPr marL="1119226" algn="l" defTabSz="373075" rtl="0" eaLnBrk="1" latinLnBrk="0" hangingPunct="1">
-      <a:defRPr sz="490" kern="1200">
+    <a:lvl7pPr marL="2174432" algn="l" defTabSz="724810" rtl="0" eaLnBrk="1" latinLnBrk="0" hangingPunct="1">
+      <a:defRPr sz="952" kern="1200">
         <a:solidFill>
           <a:schemeClr val="tx1"/>
         </a:solidFill>
@@ -435,8 +440,8 @@
         <a:cs typeface="+mn-cs"/>
       </a:defRPr>
     </a:lvl7pPr>
-    <a:lvl8pPr marL="1305763" algn="l" defTabSz="373075" rtl="0" eaLnBrk="1" latinLnBrk="0" hangingPunct="1">
-      <a:defRPr sz="490" kern="1200">
+    <a:lvl8pPr marL="2536836" algn="l" defTabSz="724810" rtl="0" eaLnBrk="1" latinLnBrk="0" hangingPunct="1">
+      <a:defRPr sz="952" kern="1200">
         <a:solidFill>
           <a:schemeClr val="tx1"/>
         </a:solidFill>
@@ -445,8 +450,8 @@
         <a:cs typeface="+mn-cs"/>
       </a:defRPr>
     </a:lvl8pPr>
-    <a:lvl9pPr marL="1492301" algn="l" defTabSz="373075" rtl="0" eaLnBrk="1" latinLnBrk="0" hangingPunct="1">
-      <a:defRPr sz="490" kern="1200">
+    <a:lvl9pPr marL="2899242" algn="l" defTabSz="724810" rtl="0" eaLnBrk="1" latinLnBrk="0" hangingPunct="1">
+      <a:defRPr sz="952" kern="1200">
         <a:solidFill>
           <a:schemeClr val="tx1"/>
         </a:solidFill>
@@ -488,8 +493,8 @@
         </p:nvSpPr>
         <p:spPr>
           <a:xfrm>
-            <a:off x="-1585913" y="1143000"/>
-            <a:ext cx="10029826" cy="3086100"/>
+            <a:off x="-857250" y="1143000"/>
+            <a:ext cx="8572500" cy="3086100"/>
           </a:xfrm>
         </p:spPr>
       </p:sp>
@@ -577,15 +582,15 @@
         </p:nvSpPr>
         <p:spPr>
           <a:xfrm>
-            <a:off x="742950" y="299297"/>
-            <a:ext cx="4457700" cy="636693"/>
+            <a:off x="1428750" y="673418"/>
+            <a:ext cx="8572500" cy="1432560"/>
           </a:xfrm>
         </p:spPr>
         <p:txBody>
           <a:bodyPr anchor="b"/>
           <a:lstStyle>
             <a:lvl1pPr algn="ctr">
-              <a:defRPr sz="1600"/>
+              <a:defRPr sz="3600"/>
             </a:lvl1pPr>
           </a:lstStyle>
           <a:p>
@@ -609,8 +614,8 @@
         </p:nvSpPr>
         <p:spPr>
           <a:xfrm>
-            <a:off x="742950" y="960543"/>
-            <a:ext cx="4457700" cy="441537"/>
+            <a:off x="1428750" y="2161223"/>
+            <a:ext cx="8572500" cy="993457"/>
           </a:xfrm>
         </p:spPr>
         <p:txBody>
@@ -618,39 +623,39 @@
           <a:lstStyle>
             <a:lvl1pPr marL="0" indent="0" algn="ctr">
               <a:buNone/>
-              <a:defRPr sz="640"/>
+              <a:defRPr sz="1440"/>
             </a:lvl1pPr>
-            <a:lvl2pPr marL="121935" indent="0" algn="ctr">
-              <a:buNone/>
-              <a:defRPr sz="533"/>
+            <a:lvl2pPr marL="274320" indent="0" algn="ctr">
+              <a:buNone/>
+              <a:defRPr sz="1200"/>
             </a:lvl2pPr>
-            <a:lvl3pPr marL="243870" indent="0" algn="ctr">
-              <a:buNone/>
-              <a:defRPr sz="480"/>
+            <a:lvl3pPr marL="548640" indent="0" algn="ctr">
+              <a:buNone/>
+              <a:defRPr sz="1080"/>
             </a:lvl3pPr>
-            <a:lvl4pPr marL="365806" indent="0" algn="ctr">
-              <a:buNone/>
-              <a:defRPr sz="427"/>
+            <a:lvl4pPr marL="822960" indent="0" algn="ctr">
+              <a:buNone/>
+              <a:defRPr sz="960"/>
             </a:lvl4pPr>
-            <a:lvl5pPr marL="487741" indent="0" algn="ctr">
-              <a:buNone/>
-              <a:defRPr sz="427"/>
+            <a:lvl5pPr marL="1097280" indent="0" algn="ctr">
+              <a:buNone/>
+              <a:defRPr sz="960"/>
             </a:lvl5pPr>
-            <a:lvl6pPr marL="609676" indent="0" algn="ctr">
-              <a:buNone/>
-              <a:defRPr sz="427"/>
+            <a:lvl6pPr marL="1371600" indent="0" algn="ctr">
+              <a:buNone/>
+              <a:defRPr sz="960"/>
             </a:lvl6pPr>
-            <a:lvl7pPr marL="731611" indent="0" algn="ctr">
-              <a:buNone/>
-              <a:defRPr sz="427"/>
+            <a:lvl7pPr marL="1645920" indent="0" algn="ctr">
+              <a:buNone/>
+              <a:defRPr sz="960"/>
             </a:lvl7pPr>
-            <a:lvl8pPr marL="853547" indent="0" algn="ctr">
-              <a:buNone/>
-              <a:defRPr sz="427"/>
+            <a:lvl8pPr marL="1920240" indent="0" algn="ctr">
+              <a:buNone/>
+              <a:defRPr sz="960"/>
             </a:lvl8pPr>
-            <a:lvl9pPr marL="975482" indent="0" algn="ctr">
-              <a:buNone/>
-              <a:defRPr sz="427"/>
+            <a:lvl9pPr marL="2194560" indent="0" algn="ctr">
+              <a:buNone/>
+              <a:defRPr sz="960"/>
             </a:lvl9pPr>
           </a:lstStyle>
           <a:p>
@@ -679,7 +684,7 @@
           <a:p>
             <a:fld id="{BD85B6C1-B60A-6441-9DBC-B9F3BF12F2D8}" type="datetimeFigureOut">
               <a:rPr lang="en-US" smtClean="0"/>
-              <a:t>8/13/26</a:t>
+              <a:t>9/3/26</a:t>
             </a:fld>
             <a:endParaRPr lang="en-US"/>
           </a:p>
@@ -730,7 +735,7 @@
     </p:spTree>
     <p:extLst>
       <p:ext uri="{BB962C8B-B14F-4D97-AF65-F5344CB8AC3E}">
-        <p14:creationId xmlns:p14="http://schemas.microsoft.com/office/powerpoint/2010/main" val="500767893"/>
+        <p14:creationId xmlns:p14="http://schemas.microsoft.com/office/powerpoint/2010/main" val="3454811926"/>
       </p:ext>
     </p:extLst>
   </p:cSld>
@@ -849,7 +854,7 @@
           <a:p>
             <a:fld id="{BD85B6C1-B60A-6441-9DBC-B9F3BF12F2D8}" type="datetimeFigureOut">
               <a:rPr lang="en-US" smtClean="0"/>
-              <a:t>8/13/26</a:t>
+              <a:t>9/3/26</a:t>
             </a:fld>
             <a:endParaRPr lang="en-US"/>
           </a:p>
@@ -900,7 +905,7 @@
     </p:spTree>
     <p:extLst>
       <p:ext uri="{BB962C8B-B14F-4D97-AF65-F5344CB8AC3E}">
-        <p14:creationId xmlns:p14="http://schemas.microsoft.com/office/powerpoint/2010/main" val="1682253723"/>
+        <p14:creationId xmlns:p14="http://schemas.microsoft.com/office/powerpoint/2010/main" val="1153127756"/>
       </p:ext>
     </p:extLst>
   </p:cSld>
@@ -939,8 +944,8 @@
         </p:nvSpPr>
         <p:spPr>
           <a:xfrm>
-            <a:off x="4253389" y="97367"/>
-            <a:ext cx="1281589" cy="1549823"/>
+            <a:off x="8179594" y="219075"/>
+            <a:ext cx="2464594" cy="3487103"/>
           </a:xfrm>
         </p:spPr>
         <p:txBody>
@@ -967,8 +972,8 @@
         </p:nvSpPr>
         <p:spPr>
           <a:xfrm>
-            <a:off x="408623" y="97367"/>
-            <a:ext cx="3770471" cy="1549823"/>
+            <a:off x="785813" y="219075"/>
+            <a:ext cx="7250906" cy="3487103"/>
           </a:xfrm>
         </p:spPr>
         <p:txBody>
@@ -1029,7 +1034,7 @@
           <a:p>
             <a:fld id="{BD85B6C1-B60A-6441-9DBC-B9F3BF12F2D8}" type="datetimeFigureOut">
               <a:rPr lang="en-US" smtClean="0"/>
-              <a:t>8/13/26</a:t>
+              <a:t>9/3/26</a:t>
             </a:fld>
             <a:endParaRPr lang="en-US"/>
           </a:p>
@@ -1080,7 +1085,7 @@
     </p:spTree>
     <p:extLst>
       <p:ext uri="{BB962C8B-B14F-4D97-AF65-F5344CB8AC3E}">
-        <p14:creationId xmlns:p14="http://schemas.microsoft.com/office/powerpoint/2010/main" val="3925780296"/>
+        <p14:creationId xmlns:p14="http://schemas.microsoft.com/office/powerpoint/2010/main" val="4119518403"/>
       </p:ext>
     </p:extLst>
   </p:cSld>
@@ -1199,7 +1204,7 @@
           <a:p>
             <a:fld id="{BD85B6C1-B60A-6441-9DBC-B9F3BF12F2D8}" type="datetimeFigureOut">
               <a:rPr lang="en-US" smtClean="0"/>
-              <a:t>8/13/26</a:t>
+              <a:t>9/3/26</a:t>
             </a:fld>
             <a:endParaRPr lang="en-US"/>
           </a:p>
@@ -1250,7 +1255,7 @@
     </p:spTree>
     <p:extLst>
       <p:ext uri="{BB962C8B-B14F-4D97-AF65-F5344CB8AC3E}">
-        <p14:creationId xmlns:p14="http://schemas.microsoft.com/office/powerpoint/2010/main" val="3923450439"/>
+        <p14:creationId xmlns:p14="http://schemas.microsoft.com/office/powerpoint/2010/main" val="687273778"/>
       </p:ext>
     </p:extLst>
   </p:cSld>
@@ -1289,15 +1294,15 @@
         </p:nvSpPr>
         <p:spPr>
           <a:xfrm>
-            <a:off x="405527" y="455930"/>
-            <a:ext cx="5126355" cy="760730"/>
+            <a:off x="779859" y="1025843"/>
+            <a:ext cx="9858375" cy="1711642"/>
           </a:xfrm>
         </p:spPr>
         <p:txBody>
           <a:bodyPr anchor="b"/>
           <a:lstStyle>
             <a:lvl1pPr>
-              <a:defRPr sz="1600"/>
+              <a:defRPr sz="3600"/>
             </a:lvl1pPr>
           </a:lstStyle>
           <a:p>
@@ -1321,8 +1326,8 @@
         </p:nvSpPr>
         <p:spPr>
           <a:xfrm>
-            <a:off x="405527" y="1223857"/>
-            <a:ext cx="5126355" cy="400050"/>
+            <a:off x="779859" y="2753678"/>
+            <a:ext cx="9858375" cy="900112"/>
           </a:xfrm>
         </p:spPr>
         <p:txBody>
@@ -1330,7 +1335,7 @@
           <a:lstStyle>
             <a:lvl1pPr marL="0" indent="0">
               <a:buNone/>
-              <a:defRPr sz="640">
+              <a:defRPr sz="1440">
                 <a:solidFill>
                   <a:schemeClr val="tx1">
                     <a:tint val="82000"/>
@@ -1338,9 +1343,9 @@
                 </a:solidFill>
               </a:defRPr>
             </a:lvl1pPr>
-            <a:lvl2pPr marL="121935" indent="0">
-              <a:buNone/>
-              <a:defRPr sz="533">
+            <a:lvl2pPr marL="274320" indent="0">
+              <a:buNone/>
+              <a:defRPr sz="1200">
                 <a:solidFill>
                   <a:schemeClr val="tx1">
                     <a:tint val="82000"/>
@@ -1348,9 +1353,9 @@
                 </a:solidFill>
               </a:defRPr>
             </a:lvl2pPr>
-            <a:lvl3pPr marL="243870" indent="0">
-              <a:buNone/>
-              <a:defRPr sz="480">
+            <a:lvl3pPr marL="548640" indent="0">
+              <a:buNone/>
+              <a:defRPr sz="1080">
                 <a:solidFill>
                   <a:schemeClr val="tx1">
                     <a:tint val="82000"/>
@@ -1358,9 +1363,9 @@
                 </a:solidFill>
               </a:defRPr>
             </a:lvl3pPr>
-            <a:lvl4pPr marL="365806" indent="0">
-              <a:buNone/>
-              <a:defRPr sz="427">
+            <a:lvl4pPr marL="822960" indent="0">
+              <a:buNone/>
+              <a:defRPr sz="960">
                 <a:solidFill>
                   <a:schemeClr val="tx1">
                     <a:tint val="82000"/>
@@ -1368,9 +1373,9 @@
                 </a:solidFill>
               </a:defRPr>
             </a:lvl4pPr>
-            <a:lvl5pPr marL="487741" indent="0">
-              <a:buNone/>
-              <a:defRPr sz="427">
+            <a:lvl5pPr marL="1097280" indent="0">
+              <a:buNone/>
+              <a:defRPr sz="960">
                 <a:solidFill>
                   <a:schemeClr val="tx1">
                     <a:tint val="82000"/>
@@ -1378,9 +1383,9 @@
                 </a:solidFill>
               </a:defRPr>
             </a:lvl5pPr>
-            <a:lvl6pPr marL="609676" indent="0">
-              <a:buNone/>
-              <a:defRPr sz="427">
+            <a:lvl6pPr marL="1371600" indent="0">
+              <a:buNone/>
+              <a:defRPr sz="960">
                 <a:solidFill>
                   <a:schemeClr val="tx1">
                     <a:tint val="82000"/>
@@ -1388,9 +1393,9 @@
                 </a:solidFill>
               </a:defRPr>
             </a:lvl6pPr>
-            <a:lvl7pPr marL="731611" indent="0">
-              <a:buNone/>
-              <a:defRPr sz="427">
+            <a:lvl7pPr marL="1645920" indent="0">
+              <a:buNone/>
+              <a:defRPr sz="960">
                 <a:solidFill>
                   <a:schemeClr val="tx1">
                     <a:tint val="82000"/>
@@ -1398,9 +1403,9 @@
                 </a:solidFill>
               </a:defRPr>
             </a:lvl7pPr>
-            <a:lvl8pPr marL="853547" indent="0">
-              <a:buNone/>
-              <a:defRPr sz="427">
+            <a:lvl8pPr marL="1920240" indent="0">
+              <a:buNone/>
+              <a:defRPr sz="960">
                 <a:solidFill>
                   <a:schemeClr val="tx1">
                     <a:tint val="82000"/>
@@ -1408,9 +1413,9 @@
                 </a:solidFill>
               </a:defRPr>
             </a:lvl8pPr>
-            <a:lvl9pPr marL="975482" indent="0">
-              <a:buNone/>
-              <a:defRPr sz="427">
+            <a:lvl9pPr marL="2194560" indent="0">
+              <a:buNone/>
+              <a:defRPr sz="960">
                 <a:solidFill>
                   <a:schemeClr val="tx1">
                     <a:tint val="82000"/>
@@ -1445,7 +1450,7 @@
           <a:p>
             <a:fld id="{BD85B6C1-B60A-6441-9DBC-B9F3BF12F2D8}" type="datetimeFigureOut">
               <a:rPr lang="en-US" smtClean="0"/>
-              <a:t>8/13/26</a:t>
+              <a:t>9/3/26</a:t>
             </a:fld>
             <a:endParaRPr lang="en-US"/>
           </a:p>
@@ -1496,7 +1501,7 @@
     </p:spTree>
     <p:extLst>
       <p:ext uri="{BB962C8B-B14F-4D97-AF65-F5344CB8AC3E}">
-        <p14:creationId xmlns:p14="http://schemas.microsoft.com/office/powerpoint/2010/main" val="720704967"/>
+        <p14:creationId xmlns:p14="http://schemas.microsoft.com/office/powerpoint/2010/main" val="1487183997"/>
       </p:ext>
     </p:extLst>
   </p:cSld>
@@ -1558,8 +1563,8 @@
         </p:nvSpPr>
         <p:spPr>
           <a:xfrm>
-            <a:off x="408623" y="486833"/>
-            <a:ext cx="2526030" cy="1160357"/>
+            <a:off x="785813" y="1095375"/>
+            <a:ext cx="4857750" cy="2610803"/>
           </a:xfrm>
         </p:spPr>
         <p:txBody>
@@ -1615,8 +1620,8 @@
         </p:nvSpPr>
         <p:spPr>
           <a:xfrm>
-            <a:off x="3008948" y="486833"/>
-            <a:ext cx="2526030" cy="1160357"/>
+            <a:off x="5786438" y="1095375"/>
+            <a:ext cx="4857750" cy="2610803"/>
           </a:xfrm>
         </p:spPr>
         <p:txBody>
@@ -1677,7 +1682,7 @@
           <a:p>
             <a:fld id="{BD85B6C1-B60A-6441-9DBC-B9F3BF12F2D8}" type="datetimeFigureOut">
               <a:rPr lang="en-US" smtClean="0"/>
-              <a:t>8/13/26</a:t>
+              <a:t>9/3/26</a:t>
             </a:fld>
             <a:endParaRPr lang="en-US"/>
           </a:p>
@@ -1728,7 +1733,7 @@
     </p:spTree>
     <p:extLst>
       <p:ext uri="{BB962C8B-B14F-4D97-AF65-F5344CB8AC3E}">
-        <p14:creationId xmlns:p14="http://schemas.microsoft.com/office/powerpoint/2010/main" val="2890651107"/>
+        <p14:creationId xmlns:p14="http://schemas.microsoft.com/office/powerpoint/2010/main" val="3824479545"/>
       </p:ext>
     </p:extLst>
   </p:cSld>
@@ -1767,8 +1772,8 @@
         </p:nvSpPr>
         <p:spPr>
           <a:xfrm>
-            <a:off x="409397" y="97367"/>
-            <a:ext cx="5126355" cy="353483"/>
+            <a:off x="787301" y="219075"/>
+            <a:ext cx="9858375" cy="795338"/>
           </a:xfrm>
         </p:spPr>
         <p:txBody>
@@ -1795,8 +1800,8 @@
         </p:nvSpPr>
         <p:spPr>
           <a:xfrm>
-            <a:off x="409397" y="448310"/>
-            <a:ext cx="2514421" cy="219710"/>
+            <a:off x="787302" y="1008698"/>
+            <a:ext cx="4835425" cy="494347"/>
           </a:xfrm>
         </p:spPr>
         <p:txBody>
@@ -1804,39 +1809,39 @@
           <a:lstStyle>
             <a:lvl1pPr marL="0" indent="0">
               <a:buNone/>
-              <a:defRPr sz="640" b="1"/>
+              <a:defRPr sz="1440" b="1"/>
             </a:lvl1pPr>
-            <a:lvl2pPr marL="121935" indent="0">
-              <a:buNone/>
-              <a:defRPr sz="533" b="1"/>
+            <a:lvl2pPr marL="274320" indent="0">
+              <a:buNone/>
+              <a:defRPr sz="1200" b="1"/>
             </a:lvl2pPr>
-            <a:lvl3pPr marL="243870" indent="0">
-              <a:buNone/>
-              <a:defRPr sz="480" b="1"/>
+            <a:lvl3pPr marL="548640" indent="0">
+              <a:buNone/>
+              <a:defRPr sz="1080" b="1"/>
             </a:lvl3pPr>
-            <a:lvl4pPr marL="365806" indent="0">
-              <a:buNone/>
-              <a:defRPr sz="427" b="1"/>
+            <a:lvl4pPr marL="822960" indent="0">
+              <a:buNone/>
+              <a:defRPr sz="960" b="1"/>
             </a:lvl4pPr>
-            <a:lvl5pPr marL="487741" indent="0">
-              <a:buNone/>
-              <a:defRPr sz="427" b="1"/>
+            <a:lvl5pPr marL="1097280" indent="0">
+              <a:buNone/>
+              <a:defRPr sz="960" b="1"/>
             </a:lvl5pPr>
-            <a:lvl6pPr marL="609676" indent="0">
-              <a:buNone/>
-              <a:defRPr sz="427" b="1"/>
+            <a:lvl6pPr marL="1371600" indent="0">
+              <a:buNone/>
+              <a:defRPr sz="960" b="1"/>
             </a:lvl6pPr>
-            <a:lvl7pPr marL="731611" indent="0">
-              <a:buNone/>
-              <a:defRPr sz="427" b="1"/>
+            <a:lvl7pPr marL="1645920" indent="0">
+              <a:buNone/>
+              <a:defRPr sz="960" b="1"/>
             </a:lvl7pPr>
-            <a:lvl8pPr marL="853547" indent="0">
-              <a:buNone/>
-              <a:defRPr sz="427" b="1"/>
+            <a:lvl8pPr marL="1920240" indent="0">
+              <a:buNone/>
+              <a:defRPr sz="960" b="1"/>
             </a:lvl8pPr>
-            <a:lvl9pPr marL="975482" indent="0">
-              <a:buNone/>
-              <a:defRPr sz="427" b="1"/>
+            <a:lvl9pPr marL="2194560" indent="0">
+              <a:buNone/>
+              <a:defRPr sz="960" b="1"/>
             </a:lvl9pPr>
           </a:lstStyle>
           <a:p>
@@ -1860,8 +1865,8 @@
         </p:nvSpPr>
         <p:spPr>
           <a:xfrm>
-            <a:off x="409397" y="668020"/>
-            <a:ext cx="2514421" cy="982557"/>
+            <a:off x="787302" y="1503045"/>
+            <a:ext cx="4835425" cy="2210753"/>
           </a:xfrm>
         </p:spPr>
         <p:txBody>
@@ -1917,8 +1922,8 @@
         </p:nvSpPr>
         <p:spPr>
           <a:xfrm>
-            <a:off x="3008948" y="448310"/>
-            <a:ext cx="2526804" cy="219710"/>
+            <a:off x="5786437" y="1008698"/>
+            <a:ext cx="4859239" cy="494347"/>
           </a:xfrm>
         </p:spPr>
         <p:txBody>
@@ -1926,39 +1931,39 @@
           <a:lstStyle>
             <a:lvl1pPr marL="0" indent="0">
               <a:buNone/>
-              <a:defRPr sz="640" b="1"/>
+              <a:defRPr sz="1440" b="1"/>
             </a:lvl1pPr>
-            <a:lvl2pPr marL="121935" indent="0">
-              <a:buNone/>
-              <a:defRPr sz="533" b="1"/>
+            <a:lvl2pPr marL="274320" indent="0">
+              <a:buNone/>
+              <a:defRPr sz="1200" b="1"/>
             </a:lvl2pPr>
-            <a:lvl3pPr marL="243870" indent="0">
-              <a:buNone/>
-              <a:defRPr sz="480" b="1"/>
+            <a:lvl3pPr marL="548640" indent="0">
+              <a:buNone/>
+              <a:defRPr sz="1080" b="1"/>
             </a:lvl3pPr>
-            <a:lvl4pPr marL="365806" indent="0">
-              <a:buNone/>
-              <a:defRPr sz="427" b="1"/>
+            <a:lvl4pPr marL="822960" indent="0">
+              <a:buNone/>
+              <a:defRPr sz="960" b="1"/>
             </a:lvl4pPr>
-            <a:lvl5pPr marL="487741" indent="0">
-              <a:buNone/>
-              <a:defRPr sz="427" b="1"/>
+            <a:lvl5pPr marL="1097280" indent="0">
+              <a:buNone/>
+              <a:defRPr sz="960" b="1"/>
             </a:lvl5pPr>
-            <a:lvl6pPr marL="609676" indent="0">
-              <a:buNone/>
-              <a:defRPr sz="427" b="1"/>
+            <a:lvl6pPr marL="1371600" indent="0">
+              <a:buNone/>
+              <a:defRPr sz="960" b="1"/>
             </a:lvl6pPr>
-            <a:lvl7pPr marL="731611" indent="0">
-              <a:buNone/>
-              <a:defRPr sz="427" b="1"/>
+            <a:lvl7pPr marL="1645920" indent="0">
+              <a:buNone/>
+              <a:defRPr sz="960" b="1"/>
             </a:lvl7pPr>
-            <a:lvl8pPr marL="853547" indent="0">
-              <a:buNone/>
-              <a:defRPr sz="427" b="1"/>
+            <a:lvl8pPr marL="1920240" indent="0">
+              <a:buNone/>
+              <a:defRPr sz="960" b="1"/>
             </a:lvl8pPr>
-            <a:lvl9pPr marL="975482" indent="0">
-              <a:buNone/>
-              <a:defRPr sz="427" b="1"/>
+            <a:lvl9pPr marL="2194560" indent="0">
+              <a:buNone/>
+              <a:defRPr sz="960" b="1"/>
             </a:lvl9pPr>
           </a:lstStyle>
           <a:p>
@@ -1982,8 +1987,8 @@
         </p:nvSpPr>
         <p:spPr>
           <a:xfrm>
-            <a:off x="3008948" y="668020"/>
-            <a:ext cx="2526804" cy="982557"/>
+            <a:off x="5786437" y="1503045"/>
+            <a:ext cx="4859239" cy="2210753"/>
           </a:xfrm>
         </p:spPr>
         <p:txBody>
@@ -2044,7 +2049,7 @@
           <a:p>
             <a:fld id="{BD85B6C1-B60A-6441-9DBC-B9F3BF12F2D8}" type="datetimeFigureOut">
               <a:rPr lang="en-US" smtClean="0"/>
-              <a:t>8/13/26</a:t>
+              <a:t>9/3/26</a:t>
             </a:fld>
             <a:endParaRPr lang="en-US"/>
           </a:p>
@@ -2095,7 +2100,7 @@
     </p:spTree>
     <p:extLst>
       <p:ext uri="{BB962C8B-B14F-4D97-AF65-F5344CB8AC3E}">
-        <p14:creationId xmlns:p14="http://schemas.microsoft.com/office/powerpoint/2010/main" val="4009596568"/>
+        <p14:creationId xmlns:p14="http://schemas.microsoft.com/office/powerpoint/2010/main" val="1555160128"/>
       </p:ext>
     </p:extLst>
   </p:cSld>
@@ -2162,7 +2167,7 @@
           <a:p>
             <a:fld id="{BD85B6C1-B60A-6441-9DBC-B9F3BF12F2D8}" type="datetimeFigureOut">
               <a:rPr lang="en-US" smtClean="0"/>
-              <a:t>8/13/26</a:t>
+              <a:t>9/3/26</a:t>
             </a:fld>
             <a:endParaRPr lang="en-US"/>
           </a:p>
@@ -2213,7 +2218,7 @@
     </p:spTree>
     <p:extLst>
       <p:ext uri="{BB962C8B-B14F-4D97-AF65-F5344CB8AC3E}">
-        <p14:creationId xmlns:p14="http://schemas.microsoft.com/office/powerpoint/2010/main" val="2208335680"/>
+        <p14:creationId xmlns:p14="http://schemas.microsoft.com/office/powerpoint/2010/main" val="483265232"/>
       </p:ext>
     </p:extLst>
   </p:cSld>
@@ -2257,7 +2262,7 @@
           <a:p>
             <a:fld id="{BD85B6C1-B60A-6441-9DBC-B9F3BF12F2D8}" type="datetimeFigureOut">
               <a:rPr lang="en-US" smtClean="0"/>
-              <a:t>8/13/26</a:t>
+              <a:t>9/3/26</a:t>
             </a:fld>
             <a:endParaRPr lang="en-US"/>
           </a:p>
@@ -2308,7 +2313,7 @@
     </p:spTree>
     <p:extLst>
       <p:ext uri="{BB962C8B-B14F-4D97-AF65-F5344CB8AC3E}">
-        <p14:creationId xmlns:p14="http://schemas.microsoft.com/office/powerpoint/2010/main" val="1939243094"/>
+        <p14:creationId xmlns:p14="http://schemas.microsoft.com/office/powerpoint/2010/main" val="3026390319"/>
       </p:ext>
     </p:extLst>
   </p:cSld>
@@ -2347,15 +2352,15 @@
         </p:nvSpPr>
         <p:spPr>
           <a:xfrm>
-            <a:off x="409397" y="121920"/>
-            <a:ext cx="1916966" cy="426720"/>
+            <a:off x="787302" y="274320"/>
+            <a:ext cx="3686472" cy="960120"/>
           </a:xfrm>
         </p:spPr>
         <p:txBody>
           <a:bodyPr anchor="b"/>
           <a:lstStyle>
             <a:lvl1pPr>
-              <a:defRPr sz="853"/>
+              <a:defRPr sz="1920"/>
             </a:lvl1pPr>
           </a:lstStyle>
           <a:p>
@@ -2379,39 +2384,39 @@
         </p:nvSpPr>
         <p:spPr>
           <a:xfrm>
-            <a:off x="2526804" y="263314"/>
-            <a:ext cx="3008948" cy="1299633"/>
+            <a:off x="4859238" y="592455"/>
+            <a:ext cx="5786438" cy="2924175"/>
           </a:xfrm>
         </p:spPr>
         <p:txBody>
           <a:bodyPr/>
           <a:lstStyle>
             <a:lvl1pPr>
-              <a:defRPr sz="853"/>
+              <a:defRPr sz="1920"/>
             </a:lvl1pPr>
             <a:lvl2pPr>
-              <a:defRPr sz="747"/>
+              <a:defRPr sz="1680"/>
             </a:lvl2pPr>
             <a:lvl3pPr>
-              <a:defRPr sz="640"/>
+              <a:defRPr sz="1440"/>
             </a:lvl3pPr>
             <a:lvl4pPr>
-              <a:defRPr sz="533"/>
+              <a:defRPr sz="1200"/>
             </a:lvl4pPr>
             <a:lvl5pPr>
-              <a:defRPr sz="533"/>
+              <a:defRPr sz="1200"/>
             </a:lvl5pPr>
             <a:lvl6pPr>
-              <a:defRPr sz="533"/>
+              <a:defRPr sz="1200"/>
             </a:lvl6pPr>
             <a:lvl7pPr>
-              <a:defRPr sz="533"/>
+              <a:defRPr sz="1200"/>
             </a:lvl7pPr>
             <a:lvl8pPr>
-              <a:defRPr sz="533"/>
+              <a:defRPr sz="1200"/>
             </a:lvl8pPr>
             <a:lvl9pPr>
-              <a:defRPr sz="533"/>
+              <a:defRPr sz="1200"/>
             </a:lvl9pPr>
           </a:lstStyle>
           <a:p>
@@ -2464,8 +2469,8 @@
         </p:nvSpPr>
         <p:spPr>
           <a:xfrm>
-            <a:off x="409397" y="548640"/>
-            <a:ext cx="1916966" cy="1016423"/>
+            <a:off x="787302" y="1234440"/>
+            <a:ext cx="3686472" cy="2286953"/>
           </a:xfrm>
         </p:spPr>
         <p:txBody>
@@ -2473,39 +2478,39 @@
           <a:lstStyle>
             <a:lvl1pPr marL="0" indent="0">
               <a:buNone/>
-              <a:defRPr sz="427"/>
+              <a:defRPr sz="960"/>
             </a:lvl1pPr>
-            <a:lvl2pPr marL="121935" indent="0">
-              <a:buNone/>
-              <a:defRPr sz="373"/>
+            <a:lvl2pPr marL="274320" indent="0">
+              <a:buNone/>
+              <a:defRPr sz="840"/>
             </a:lvl2pPr>
-            <a:lvl3pPr marL="243870" indent="0">
-              <a:buNone/>
-              <a:defRPr sz="320"/>
+            <a:lvl3pPr marL="548640" indent="0">
+              <a:buNone/>
+              <a:defRPr sz="720"/>
             </a:lvl3pPr>
-            <a:lvl4pPr marL="365806" indent="0">
-              <a:buNone/>
-              <a:defRPr sz="267"/>
+            <a:lvl4pPr marL="822960" indent="0">
+              <a:buNone/>
+              <a:defRPr sz="600"/>
             </a:lvl4pPr>
-            <a:lvl5pPr marL="487741" indent="0">
-              <a:buNone/>
-              <a:defRPr sz="267"/>
+            <a:lvl5pPr marL="1097280" indent="0">
+              <a:buNone/>
+              <a:defRPr sz="600"/>
             </a:lvl5pPr>
-            <a:lvl6pPr marL="609676" indent="0">
-              <a:buNone/>
-              <a:defRPr sz="267"/>
+            <a:lvl6pPr marL="1371600" indent="0">
+              <a:buNone/>
+              <a:defRPr sz="600"/>
             </a:lvl6pPr>
-            <a:lvl7pPr marL="731611" indent="0">
-              <a:buNone/>
-              <a:defRPr sz="267"/>
+            <a:lvl7pPr marL="1645920" indent="0">
+              <a:buNone/>
+              <a:defRPr sz="600"/>
             </a:lvl7pPr>
-            <a:lvl8pPr marL="853547" indent="0">
-              <a:buNone/>
-              <a:defRPr sz="267"/>
+            <a:lvl8pPr marL="1920240" indent="0">
+              <a:buNone/>
+              <a:defRPr sz="600"/>
             </a:lvl8pPr>
-            <a:lvl9pPr marL="975482" indent="0">
-              <a:buNone/>
-              <a:defRPr sz="267"/>
+            <a:lvl9pPr marL="2194560" indent="0">
+              <a:buNone/>
+              <a:defRPr sz="600"/>
             </a:lvl9pPr>
           </a:lstStyle>
           <a:p>
@@ -2534,7 +2539,7 @@
           <a:p>
             <a:fld id="{BD85B6C1-B60A-6441-9DBC-B9F3BF12F2D8}" type="datetimeFigureOut">
               <a:rPr lang="en-US" smtClean="0"/>
-              <a:t>8/13/26</a:t>
+              <a:t>9/3/26</a:t>
             </a:fld>
             <a:endParaRPr lang="en-US"/>
           </a:p>
@@ -2585,7 +2590,7 @@
     </p:spTree>
     <p:extLst>
       <p:ext uri="{BB962C8B-B14F-4D97-AF65-F5344CB8AC3E}">
-        <p14:creationId xmlns:p14="http://schemas.microsoft.com/office/powerpoint/2010/main" val="2082457482"/>
+        <p14:creationId xmlns:p14="http://schemas.microsoft.com/office/powerpoint/2010/main" val="4112146414"/>
       </p:ext>
     </p:extLst>
   </p:cSld>
@@ -2624,15 +2629,15 @@
         </p:nvSpPr>
         <p:spPr>
           <a:xfrm>
-            <a:off x="409397" y="121920"/>
-            <a:ext cx="1916966" cy="426720"/>
+            <a:off x="787302" y="274320"/>
+            <a:ext cx="3686472" cy="960120"/>
           </a:xfrm>
         </p:spPr>
         <p:txBody>
           <a:bodyPr anchor="b"/>
           <a:lstStyle>
             <a:lvl1pPr>
-              <a:defRPr sz="853"/>
+              <a:defRPr sz="1920"/>
             </a:lvl1pPr>
           </a:lstStyle>
           <a:p>
@@ -2656,8 +2661,8 @@
         </p:nvSpPr>
         <p:spPr>
           <a:xfrm>
-            <a:off x="2526804" y="263314"/>
-            <a:ext cx="3008948" cy="1299633"/>
+            <a:off x="4859238" y="592455"/>
+            <a:ext cx="5786438" cy="2924175"/>
           </a:xfrm>
         </p:spPr>
         <p:txBody>
@@ -2665,39 +2670,39 @@
           <a:lstStyle>
             <a:lvl1pPr marL="0" indent="0">
               <a:buNone/>
-              <a:defRPr sz="853"/>
+              <a:defRPr sz="1920"/>
             </a:lvl1pPr>
-            <a:lvl2pPr marL="121935" indent="0">
-              <a:buNone/>
-              <a:defRPr sz="747"/>
+            <a:lvl2pPr marL="274320" indent="0">
+              <a:buNone/>
+              <a:defRPr sz="1680"/>
             </a:lvl2pPr>
-            <a:lvl3pPr marL="243870" indent="0">
-              <a:buNone/>
-              <a:defRPr sz="640"/>
+            <a:lvl3pPr marL="548640" indent="0">
+              <a:buNone/>
+              <a:defRPr sz="1440"/>
             </a:lvl3pPr>
-            <a:lvl4pPr marL="365806" indent="0">
-              <a:buNone/>
-              <a:defRPr sz="533"/>
+            <a:lvl4pPr marL="822960" indent="0">
+              <a:buNone/>
+              <a:defRPr sz="1200"/>
             </a:lvl4pPr>
-            <a:lvl5pPr marL="487741" indent="0">
-              <a:buNone/>
-              <a:defRPr sz="533"/>
+            <a:lvl5pPr marL="1097280" indent="0">
+              <a:buNone/>
+              <a:defRPr sz="1200"/>
             </a:lvl5pPr>
-            <a:lvl6pPr marL="609676" indent="0">
-              <a:buNone/>
-              <a:defRPr sz="533"/>
+            <a:lvl6pPr marL="1371600" indent="0">
+              <a:buNone/>
+              <a:defRPr sz="1200"/>
             </a:lvl6pPr>
-            <a:lvl7pPr marL="731611" indent="0">
-              <a:buNone/>
-              <a:defRPr sz="533"/>
+            <a:lvl7pPr marL="1645920" indent="0">
+              <a:buNone/>
+              <a:defRPr sz="1200"/>
             </a:lvl7pPr>
-            <a:lvl8pPr marL="853547" indent="0">
-              <a:buNone/>
-              <a:defRPr sz="533"/>
+            <a:lvl8pPr marL="1920240" indent="0">
+              <a:buNone/>
+              <a:defRPr sz="1200"/>
             </a:lvl8pPr>
-            <a:lvl9pPr marL="975482" indent="0">
-              <a:buNone/>
-              <a:defRPr sz="533"/>
+            <a:lvl9pPr marL="2194560" indent="0">
+              <a:buNone/>
+              <a:defRPr sz="1200"/>
             </a:lvl9pPr>
           </a:lstStyle>
           <a:p>
@@ -2721,8 +2726,8 @@
         </p:nvSpPr>
         <p:spPr>
           <a:xfrm>
-            <a:off x="409397" y="548640"/>
-            <a:ext cx="1916966" cy="1016423"/>
+            <a:off x="787302" y="1234440"/>
+            <a:ext cx="3686472" cy="2286953"/>
           </a:xfrm>
         </p:spPr>
         <p:txBody>
@@ -2730,39 +2735,39 @@
           <a:lstStyle>
             <a:lvl1pPr marL="0" indent="0">
               <a:buNone/>
-              <a:defRPr sz="427"/>
+              <a:defRPr sz="960"/>
             </a:lvl1pPr>
-            <a:lvl2pPr marL="121935" indent="0">
-              <a:buNone/>
-              <a:defRPr sz="373"/>
+            <a:lvl2pPr marL="274320" indent="0">
+              <a:buNone/>
+              <a:defRPr sz="840"/>
             </a:lvl2pPr>
-            <a:lvl3pPr marL="243870" indent="0">
-              <a:buNone/>
-              <a:defRPr sz="320"/>
+            <a:lvl3pPr marL="548640" indent="0">
+              <a:buNone/>
+              <a:defRPr sz="720"/>
             </a:lvl3pPr>
-            <a:lvl4pPr marL="365806" indent="0">
-              <a:buNone/>
-              <a:defRPr sz="267"/>
+            <a:lvl4pPr marL="822960" indent="0">
+              <a:buNone/>
+              <a:defRPr sz="600"/>
             </a:lvl4pPr>
-            <a:lvl5pPr marL="487741" indent="0">
-              <a:buNone/>
-              <a:defRPr sz="267"/>
+            <a:lvl5pPr marL="1097280" indent="0">
+              <a:buNone/>
+              <a:defRPr sz="600"/>
             </a:lvl5pPr>
-            <a:lvl6pPr marL="609676" indent="0">
-              <a:buNone/>
-              <a:defRPr sz="267"/>
+            <a:lvl6pPr marL="1371600" indent="0">
+              <a:buNone/>
+              <a:defRPr sz="600"/>
             </a:lvl6pPr>
-            <a:lvl7pPr marL="731611" indent="0">
-              <a:buNone/>
-              <a:defRPr sz="267"/>
+            <a:lvl7pPr marL="1645920" indent="0">
+              <a:buNone/>
+              <a:defRPr sz="600"/>
             </a:lvl7pPr>
-            <a:lvl8pPr marL="853547" indent="0">
-              <a:buNone/>
-              <a:defRPr sz="267"/>
+            <a:lvl8pPr marL="1920240" indent="0">
+              <a:buNone/>
+              <a:defRPr sz="600"/>
             </a:lvl8pPr>
-            <a:lvl9pPr marL="975482" indent="0">
-              <a:buNone/>
-              <a:defRPr sz="267"/>
+            <a:lvl9pPr marL="2194560" indent="0">
+              <a:buNone/>
+              <a:defRPr sz="600"/>
             </a:lvl9pPr>
           </a:lstStyle>
           <a:p>
@@ -2791,7 +2796,7 @@
           <a:p>
             <a:fld id="{BD85B6C1-B60A-6441-9DBC-B9F3BF12F2D8}" type="datetimeFigureOut">
               <a:rPr lang="en-US" smtClean="0"/>
-              <a:t>8/13/26</a:t>
+              <a:t>9/3/26</a:t>
             </a:fld>
             <a:endParaRPr lang="en-US"/>
           </a:p>
@@ -2842,7 +2847,7 @@
     </p:spTree>
     <p:extLst>
       <p:ext uri="{BB962C8B-B14F-4D97-AF65-F5344CB8AC3E}">
-        <p14:creationId xmlns:p14="http://schemas.microsoft.com/office/powerpoint/2010/main" val="2294159453"/>
+        <p14:creationId xmlns:p14="http://schemas.microsoft.com/office/powerpoint/2010/main" val="3190963956"/>
       </p:ext>
     </p:extLst>
   </p:cSld>
@@ -2886,8 +2891,8 @@
         </p:nvSpPr>
         <p:spPr>
           <a:xfrm>
-            <a:off x="408623" y="97367"/>
-            <a:ext cx="5126355" cy="353483"/>
+            <a:off x="785813" y="219075"/>
+            <a:ext cx="9858375" cy="795338"/>
           </a:xfrm>
           <a:prstGeom prst="rect">
             <a:avLst/>
@@ -2919,8 +2924,8 @@
         </p:nvSpPr>
         <p:spPr>
           <a:xfrm>
-            <a:off x="408623" y="486833"/>
-            <a:ext cx="5126355" cy="1160357"/>
+            <a:off x="785813" y="1095375"/>
+            <a:ext cx="9858375" cy="2610803"/>
           </a:xfrm>
           <a:prstGeom prst="rect">
             <a:avLst/>
@@ -2981,8 +2986,8 @@
         </p:nvSpPr>
         <p:spPr>
           <a:xfrm>
-            <a:off x="408622" y="1695027"/>
-            <a:ext cx="1337310" cy="97367"/>
+            <a:off x="785812" y="3813810"/>
+            <a:ext cx="2571750" cy="219075"/>
           </a:xfrm>
           <a:prstGeom prst="rect">
             <a:avLst/>
@@ -2992,7 +2997,7 @@
           <a:bodyPr vert="horz" lIns="91440" tIns="45720" rIns="91440" bIns="45720" rtlCol="0" anchor="ctr"/>
           <a:lstStyle>
             <a:lvl1pPr algn="l">
-              <a:defRPr sz="320">
+              <a:defRPr sz="720">
                 <a:solidFill>
                   <a:schemeClr val="tx1">
                     <a:tint val="82000"/>
@@ -3004,7 +3009,7 @@
           <a:p>
             <a:fld id="{BD85B6C1-B60A-6441-9DBC-B9F3BF12F2D8}" type="datetimeFigureOut">
               <a:rPr lang="en-US" smtClean="0"/>
-              <a:t>8/13/26</a:t>
+              <a:t>9/3/26</a:t>
             </a:fld>
             <a:endParaRPr lang="en-US"/>
           </a:p>
@@ -3022,8 +3027,8 @@
         </p:nvSpPr>
         <p:spPr>
           <a:xfrm>
-            <a:off x="1968818" y="1695027"/>
-            <a:ext cx="2005965" cy="97367"/>
+            <a:off x="3786188" y="3813810"/>
+            <a:ext cx="3857625" cy="219075"/>
           </a:xfrm>
           <a:prstGeom prst="rect">
             <a:avLst/>
@@ -3033,7 +3038,7 @@
           <a:bodyPr vert="horz" lIns="91440" tIns="45720" rIns="91440" bIns="45720" rtlCol="0" anchor="ctr"/>
           <a:lstStyle>
             <a:lvl1pPr algn="ctr">
-              <a:defRPr sz="320">
+              <a:defRPr sz="720">
                 <a:solidFill>
                   <a:schemeClr val="tx1">
                     <a:tint val="82000"/>
@@ -3059,8 +3064,8 @@
         </p:nvSpPr>
         <p:spPr>
           <a:xfrm>
-            <a:off x="4197668" y="1695027"/>
-            <a:ext cx="1337310" cy="97367"/>
+            <a:off x="8072438" y="3813810"/>
+            <a:ext cx="2571750" cy="219075"/>
           </a:xfrm>
           <a:prstGeom prst="rect">
             <a:avLst/>
@@ -3070,7 +3075,7 @@
           <a:bodyPr vert="horz" lIns="91440" tIns="45720" rIns="91440" bIns="45720" rtlCol="0" anchor="ctr"/>
           <a:lstStyle>
             <a:lvl1pPr algn="r">
-              <a:defRPr sz="320">
+              <a:defRPr sz="720">
                 <a:solidFill>
                   <a:schemeClr val="tx1">
                     <a:tint val="82000"/>
@@ -3091,27 +3096,27 @@
     </p:spTree>
     <p:extLst>
       <p:ext uri="{BB962C8B-B14F-4D97-AF65-F5344CB8AC3E}">
-        <p14:creationId xmlns:p14="http://schemas.microsoft.com/office/powerpoint/2010/main" val="2694268393"/>
+        <p14:creationId xmlns:p14="http://schemas.microsoft.com/office/powerpoint/2010/main" val="287466680"/>
       </p:ext>
     </p:extLst>
   </p:cSld>
   <p:clrMap bg1="lt1" tx1="dk1" bg2="lt2" tx2="dk2" accent1="accent1" accent2="accent2" accent3="accent3" accent4="accent4" accent5="accent5" accent6="accent6" hlink="hlink" folHlink="folHlink"/>
   <p:sldLayoutIdLst>
-    <p:sldLayoutId id="2147483685" r:id="rId1"/>
-    <p:sldLayoutId id="2147483686" r:id="rId2"/>
-    <p:sldLayoutId id="2147483687" r:id="rId3"/>
-    <p:sldLayoutId id="2147483688" r:id="rId4"/>
-    <p:sldLayoutId id="2147483689" r:id="rId5"/>
-    <p:sldLayoutId id="2147483690" r:id="rId6"/>
-    <p:sldLayoutId id="2147483691" r:id="rId7"/>
-    <p:sldLayoutId id="2147483692" r:id="rId8"/>
-    <p:sldLayoutId id="2147483693" r:id="rId9"/>
-    <p:sldLayoutId id="2147483694" r:id="rId10"/>
-    <p:sldLayoutId id="2147483695" r:id="rId11"/>
+    <p:sldLayoutId id="2147483709" r:id="rId1"/>
+    <p:sldLayoutId id="2147483710" r:id="rId2"/>
+    <p:sldLayoutId id="2147483711" r:id="rId3"/>
+    <p:sldLayoutId id="2147483712" r:id="rId4"/>
+    <p:sldLayoutId id="2147483713" r:id="rId5"/>
+    <p:sldLayoutId id="2147483714" r:id="rId6"/>
+    <p:sldLayoutId id="2147483715" r:id="rId7"/>
+    <p:sldLayoutId id="2147483716" r:id="rId8"/>
+    <p:sldLayoutId id="2147483717" r:id="rId9"/>
+    <p:sldLayoutId id="2147483718" r:id="rId10"/>
+    <p:sldLayoutId id="2147483719" r:id="rId11"/>
   </p:sldLayoutIdLst>
   <p:txStyles>
     <p:titleStyle>
-      <a:lvl1pPr algn="l" defTabSz="243870" rtl="0" eaLnBrk="1" latinLnBrk="0" hangingPunct="1">
+      <a:lvl1pPr algn="l" defTabSz="548640" rtl="0" eaLnBrk="1" latinLnBrk="0" hangingPunct="1">
         <a:lnSpc>
           <a:spcPct val="90000"/>
         </a:lnSpc>
@@ -3119,7 +3124,7 @@
           <a:spcPct val="0"/>
         </a:spcBef>
         <a:buNone/>
-        <a:defRPr sz="1173" kern="1200">
+        <a:defRPr sz="2640" kern="1200">
           <a:solidFill>
             <a:schemeClr val="tx1"/>
           </a:solidFill>
@@ -3130,16 +3135,16 @@
       </a:lvl1pPr>
     </p:titleStyle>
     <p:bodyStyle>
-      <a:lvl1pPr marL="60968" indent="-60968" algn="l" defTabSz="243870" rtl="0" eaLnBrk="1" latinLnBrk="0" hangingPunct="1">
+      <a:lvl1pPr marL="137160" indent="-137160" algn="l" defTabSz="548640" rtl="0" eaLnBrk="1" latinLnBrk="0" hangingPunct="1">
         <a:lnSpc>
           <a:spcPct val="90000"/>
         </a:lnSpc>
         <a:spcBef>
-          <a:spcPts val="267"/>
+          <a:spcPts val="600"/>
         </a:spcBef>
         <a:buFont typeface="Arial" panose="020B0604020202020204" pitchFamily="34" charset="0"/>
         <a:buChar char="•"/>
-        <a:defRPr sz="747" kern="1200">
+        <a:defRPr sz="1680" kern="1200">
           <a:solidFill>
             <a:schemeClr val="tx1"/>
           </a:solidFill>
@@ -3148,16 +3153,16 @@
           <a:cs typeface="+mn-cs"/>
         </a:defRPr>
       </a:lvl1pPr>
-      <a:lvl2pPr marL="182903" indent="-60968" algn="l" defTabSz="243870" rtl="0" eaLnBrk="1" latinLnBrk="0" hangingPunct="1">
+      <a:lvl2pPr marL="411480" indent="-137160" algn="l" defTabSz="548640" rtl="0" eaLnBrk="1" latinLnBrk="0" hangingPunct="1">
         <a:lnSpc>
           <a:spcPct val="90000"/>
         </a:lnSpc>
         <a:spcBef>
-          <a:spcPts val="133"/>
+          <a:spcPts val="300"/>
         </a:spcBef>
         <a:buFont typeface="Arial" panose="020B0604020202020204" pitchFamily="34" charset="0"/>
         <a:buChar char="•"/>
-        <a:defRPr sz="640" kern="1200">
+        <a:defRPr sz="1440" kern="1200">
           <a:solidFill>
             <a:schemeClr val="tx1"/>
           </a:solidFill>
@@ -3166,16 +3171,16 @@
           <a:cs typeface="+mn-cs"/>
         </a:defRPr>
       </a:lvl2pPr>
-      <a:lvl3pPr marL="304838" indent="-60968" algn="l" defTabSz="243870" rtl="0" eaLnBrk="1" latinLnBrk="0" hangingPunct="1">
+      <a:lvl3pPr marL="685800" indent="-137160" algn="l" defTabSz="548640" rtl="0" eaLnBrk="1" latinLnBrk="0" hangingPunct="1">
         <a:lnSpc>
           <a:spcPct val="90000"/>
         </a:lnSpc>
         <a:spcBef>
-          <a:spcPts val="133"/>
+          <a:spcPts val="300"/>
         </a:spcBef>
         <a:buFont typeface="Arial" panose="020B0604020202020204" pitchFamily="34" charset="0"/>
         <a:buChar char="•"/>
-        <a:defRPr sz="533" kern="1200">
+        <a:defRPr sz="1200" kern="1200">
           <a:solidFill>
             <a:schemeClr val="tx1"/>
           </a:solidFill>
@@ -3184,16 +3189,16 @@
           <a:cs typeface="+mn-cs"/>
         </a:defRPr>
       </a:lvl3pPr>
-      <a:lvl4pPr marL="426773" indent="-60968" algn="l" defTabSz="243870" rtl="0" eaLnBrk="1" latinLnBrk="0" hangingPunct="1">
+      <a:lvl4pPr marL="960120" indent="-137160" algn="l" defTabSz="548640" rtl="0" eaLnBrk="1" latinLnBrk="0" hangingPunct="1">
         <a:lnSpc>
           <a:spcPct val="90000"/>
         </a:lnSpc>
         <a:spcBef>
-          <a:spcPts val="133"/>
+          <a:spcPts val="300"/>
         </a:spcBef>
         <a:buFont typeface="Arial" panose="020B0604020202020204" pitchFamily="34" charset="0"/>
         <a:buChar char="•"/>
-        <a:defRPr sz="480" kern="1200">
+        <a:defRPr sz="1080" kern="1200">
           <a:solidFill>
             <a:schemeClr val="tx1"/>
           </a:solidFill>
@@ -3202,16 +3207,16 @@
           <a:cs typeface="+mn-cs"/>
         </a:defRPr>
       </a:lvl4pPr>
-      <a:lvl5pPr marL="548709" indent="-60968" algn="l" defTabSz="243870" rtl="0" eaLnBrk="1" latinLnBrk="0" hangingPunct="1">
+      <a:lvl5pPr marL="1234440" indent="-137160" algn="l" defTabSz="548640" rtl="0" eaLnBrk="1" latinLnBrk="0" hangingPunct="1">
         <a:lnSpc>
           <a:spcPct val="90000"/>
         </a:lnSpc>
         <a:spcBef>
-          <a:spcPts val="133"/>
+          <a:spcPts val="300"/>
         </a:spcBef>
         <a:buFont typeface="Arial" panose="020B0604020202020204" pitchFamily="34" charset="0"/>
         <a:buChar char="•"/>
-        <a:defRPr sz="480" kern="1200">
+        <a:defRPr sz="1080" kern="1200">
           <a:solidFill>
             <a:schemeClr val="tx1"/>
           </a:solidFill>
@@ -3220,16 +3225,16 @@
           <a:cs typeface="+mn-cs"/>
         </a:defRPr>
       </a:lvl5pPr>
-      <a:lvl6pPr marL="670644" indent="-60968" algn="l" defTabSz="243870" rtl="0" eaLnBrk="1" latinLnBrk="0" hangingPunct="1">
+      <a:lvl6pPr marL="1508760" indent="-137160" algn="l" defTabSz="548640" rtl="0" eaLnBrk="1" latinLnBrk="0" hangingPunct="1">
         <a:lnSpc>
           <a:spcPct val="90000"/>
         </a:lnSpc>
         <a:spcBef>
-          <a:spcPts val="133"/>
+          <a:spcPts val="300"/>
         </a:spcBef>
         <a:buFont typeface="Arial" panose="020B0604020202020204" pitchFamily="34" charset="0"/>
         <a:buChar char="•"/>
-        <a:defRPr sz="480" kern="1200">
+        <a:defRPr sz="1080" kern="1200">
           <a:solidFill>
             <a:schemeClr val="tx1"/>
           </a:solidFill>
@@ -3238,16 +3243,16 @@
           <a:cs typeface="+mn-cs"/>
         </a:defRPr>
       </a:lvl6pPr>
-      <a:lvl7pPr marL="792579" indent="-60968" algn="l" defTabSz="243870" rtl="0" eaLnBrk="1" latinLnBrk="0" hangingPunct="1">
+      <a:lvl7pPr marL="1783080" indent="-137160" algn="l" defTabSz="548640" rtl="0" eaLnBrk="1" latinLnBrk="0" hangingPunct="1">
         <a:lnSpc>
           <a:spcPct val="90000"/>
         </a:lnSpc>
         <a:spcBef>
-          <a:spcPts val="133"/>
+          <a:spcPts val="300"/>
         </a:spcBef>
         <a:buFont typeface="Arial" panose="020B0604020202020204" pitchFamily="34" charset="0"/>
         <a:buChar char="•"/>
-        <a:defRPr sz="480" kern="1200">
+        <a:defRPr sz="1080" kern="1200">
           <a:solidFill>
             <a:schemeClr val="tx1"/>
           </a:solidFill>
@@ -3256,16 +3261,16 @@
           <a:cs typeface="+mn-cs"/>
         </a:defRPr>
       </a:lvl7pPr>
-      <a:lvl8pPr marL="914514" indent="-60968" algn="l" defTabSz="243870" rtl="0" eaLnBrk="1" latinLnBrk="0" hangingPunct="1">
+      <a:lvl8pPr marL="2057400" indent="-137160" algn="l" defTabSz="548640" rtl="0" eaLnBrk="1" latinLnBrk="0" hangingPunct="1">
         <a:lnSpc>
           <a:spcPct val="90000"/>
         </a:lnSpc>
         <a:spcBef>
-          <a:spcPts val="133"/>
+          <a:spcPts val="300"/>
         </a:spcBef>
         <a:buFont typeface="Arial" panose="020B0604020202020204" pitchFamily="34" charset="0"/>
         <a:buChar char="•"/>
-        <a:defRPr sz="480" kern="1200">
+        <a:defRPr sz="1080" kern="1200">
           <a:solidFill>
             <a:schemeClr val="tx1"/>
           </a:solidFill>
@@ -3274,16 +3279,16 @@
           <a:cs typeface="+mn-cs"/>
         </a:defRPr>
       </a:lvl8pPr>
-      <a:lvl9pPr marL="1036450" indent="-60968" algn="l" defTabSz="243870" rtl="0" eaLnBrk="1" latinLnBrk="0" hangingPunct="1">
+      <a:lvl9pPr marL="2331720" indent="-137160" algn="l" defTabSz="548640" rtl="0" eaLnBrk="1" latinLnBrk="0" hangingPunct="1">
         <a:lnSpc>
           <a:spcPct val="90000"/>
         </a:lnSpc>
         <a:spcBef>
-          <a:spcPts val="133"/>
+          <a:spcPts val="300"/>
         </a:spcBef>
         <a:buFont typeface="Arial" panose="020B0604020202020204" pitchFamily="34" charset="0"/>
         <a:buChar char="•"/>
-        <a:defRPr sz="480" kern="1200">
+        <a:defRPr sz="1080" kern="1200">
           <a:solidFill>
             <a:schemeClr val="tx1"/>
           </a:solidFill>
@@ -3297,8 +3302,8 @@
       <a:defPPr>
         <a:defRPr lang="en-US"/>
       </a:defPPr>
-      <a:lvl1pPr marL="0" algn="l" defTabSz="243870" rtl="0" eaLnBrk="1" latinLnBrk="0" hangingPunct="1">
-        <a:defRPr sz="480" kern="1200">
+      <a:lvl1pPr marL="0" algn="l" defTabSz="548640" rtl="0" eaLnBrk="1" latinLnBrk="0" hangingPunct="1">
+        <a:defRPr sz="1080" kern="1200">
           <a:solidFill>
             <a:schemeClr val="tx1"/>
           </a:solidFill>
@@ -3307,8 +3312,8 @@
           <a:cs typeface="+mn-cs"/>
         </a:defRPr>
       </a:lvl1pPr>
-      <a:lvl2pPr marL="121935" algn="l" defTabSz="243870" rtl="0" eaLnBrk="1" latinLnBrk="0" hangingPunct="1">
-        <a:defRPr sz="480" kern="1200">
+      <a:lvl2pPr marL="274320" algn="l" defTabSz="548640" rtl="0" eaLnBrk="1" latinLnBrk="0" hangingPunct="1">
+        <a:defRPr sz="1080" kern="1200">
           <a:solidFill>
             <a:schemeClr val="tx1"/>
           </a:solidFill>
@@ -3317,8 +3322,8 @@
           <a:cs typeface="+mn-cs"/>
         </a:defRPr>
       </a:lvl2pPr>
-      <a:lvl3pPr marL="243870" algn="l" defTabSz="243870" rtl="0" eaLnBrk="1" latinLnBrk="0" hangingPunct="1">
-        <a:defRPr sz="480" kern="1200">
+      <a:lvl3pPr marL="548640" algn="l" defTabSz="548640" rtl="0" eaLnBrk="1" latinLnBrk="0" hangingPunct="1">
+        <a:defRPr sz="1080" kern="1200">
           <a:solidFill>
             <a:schemeClr val="tx1"/>
           </a:solidFill>
@@ -3327,8 +3332,8 @@
           <a:cs typeface="+mn-cs"/>
         </a:defRPr>
       </a:lvl3pPr>
-      <a:lvl4pPr marL="365806" algn="l" defTabSz="243870" rtl="0" eaLnBrk="1" latinLnBrk="0" hangingPunct="1">
-        <a:defRPr sz="480" kern="1200">
+      <a:lvl4pPr marL="822960" algn="l" defTabSz="548640" rtl="0" eaLnBrk="1" latinLnBrk="0" hangingPunct="1">
+        <a:defRPr sz="1080" kern="1200">
           <a:solidFill>
             <a:schemeClr val="tx1"/>
           </a:solidFill>
@@ -3337,8 +3342,8 @@
           <a:cs typeface="+mn-cs"/>
         </a:defRPr>
       </a:lvl4pPr>
-      <a:lvl5pPr marL="487741" algn="l" defTabSz="243870" rtl="0" eaLnBrk="1" latinLnBrk="0" hangingPunct="1">
-        <a:defRPr sz="480" kern="1200">
+      <a:lvl5pPr marL="1097280" algn="l" defTabSz="548640" rtl="0" eaLnBrk="1" latinLnBrk="0" hangingPunct="1">
+        <a:defRPr sz="1080" kern="1200">
           <a:solidFill>
             <a:schemeClr val="tx1"/>
           </a:solidFill>
@@ -3347,8 +3352,8 @@
           <a:cs typeface="+mn-cs"/>
         </a:defRPr>
       </a:lvl5pPr>
-      <a:lvl6pPr marL="609676" algn="l" defTabSz="243870" rtl="0" eaLnBrk="1" latinLnBrk="0" hangingPunct="1">
-        <a:defRPr sz="480" kern="1200">
+      <a:lvl6pPr marL="1371600" algn="l" defTabSz="548640" rtl="0" eaLnBrk="1" latinLnBrk="0" hangingPunct="1">
+        <a:defRPr sz="1080" kern="1200">
           <a:solidFill>
             <a:schemeClr val="tx1"/>
           </a:solidFill>
@@ -3357,8 +3362,8 @@
           <a:cs typeface="+mn-cs"/>
         </a:defRPr>
       </a:lvl6pPr>
-      <a:lvl7pPr marL="731611" algn="l" defTabSz="243870" rtl="0" eaLnBrk="1" latinLnBrk="0" hangingPunct="1">
-        <a:defRPr sz="480" kern="1200">
+      <a:lvl7pPr marL="1645920" algn="l" defTabSz="548640" rtl="0" eaLnBrk="1" latinLnBrk="0" hangingPunct="1">
+        <a:defRPr sz="1080" kern="1200">
           <a:solidFill>
             <a:schemeClr val="tx1"/>
           </a:solidFill>
@@ -3367,8 +3372,8 @@
           <a:cs typeface="+mn-cs"/>
         </a:defRPr>
       </a:lvl7pPr>
-      <a:lvl8pPr marL="853547" algn="l" defTabSz="243870" rtl="0" eaLnBrk="1" latinLnBrk="0" hangingPunct="1">
-        <a:defRPr sz="480" kern="1200">
+      <a:lvl8pPr marL="1920240" algn="l" defTabSz="548640" rtl="0" eaLnBrk="1" latinLnBrk="0" hangingPunct="1">
+        <a:defRPr sz="1080" kern="1200">
           <a:solidFill>
             <a:schemeClr val="tx1"/>
           </a:solidFill>
@@ -3377,8 +3382,8 @@
           <a:cs typeface="+mn-cs"/>
         </a:defRPr>
       </a:lvl8pPr>
-      <a:lvl9pPr marL="975482" algn="l" defTabSz="243870" rtl="0" eaLnBrk="1" latinLnBrk="0" hangingPunct="1">
-        <a:defRPr sz="480" kern="1200">
+      <a:lvl9pPr marL="2194560" algn="l" defTabSz="548640" rtl="0" eaLnBrk="1" latinLnBrk="0" hangingPunct="1">
+        <a:defRPr sz="1080" kern="1200">
           <a:solidFill>
             <a:schemeClr val="tx1"/>
           </a:solidFill>
@@ -3431,8 +3436,8 @@
         </p:blipFill>
         <p:spPr>
           <a:xfrm>
-            <a:off x="3962400" y="0"/>
-            <a:ext cx="1981200" cy="1828800"/>
+            <a:off x="7620000" y="513381"/>
+            <a:ext cx="3810000" cy="3516923"/>
           </a:xfrm>
           <a:prstGeom prst="rect">
             <a:avLst/>
@@ -3461,8 +3466,8 @@
         </p:blipFill>
         <p:spPr>
           <a:xfrm>
-            <a:off x="1981200" y="0"/>
-            <a:ext cx="1981200" cy="1828800"/>
+            <a:off x="3810000" y="513381"/>
+            <a:ext cx="3810000" cy="3516923"/>
           </a:xfrm>
           <a:prstGeom prst="rect">
             <a:avLst/>
@@ -3491,8 +3496,8 @@
         </p:blipFill>
         <p:spPr>
           <a:xfrm>
-            <a:off x="0" y="0"/>
-            <a:ext cx="1981200" cy="1828800"/>
+            <a:off x="0" y="513381"/>
+            <a:ext cx="3810000" cy="3516923"/>
           </a:xfrm>
           <a:prstGeom prst="rect">
             <a:avLst/>
@@ -3513,8 +3518,8 @@
         </p:nvSpPr>
         <p:spPr>
           <a:xfrm>
-            <a:off x="0" y="0"/>
-            <a:ext cx="242374" cy="215444"/>
+            <a:off x="0" y="513382"/>
+            <a:ext cx="293670" cy="329001"/>
           </a:xfrm>
           <a:prstGeom prst="rect">
             <a:avLst/>
@@ -3528,7 +3533,7 @@
           <a:lstStyle/>
           <a:p>
             <a:r>
-              <a:rPr lang="en-US" sz="800" b="1" dirty="0">
+              <a:rPr lang="en-US" sz="1538" b="1" dirty="0">
                 <a:latin typeface="Arial" panose="020B0604020202020204" pitchFamily="34" charset="0"/>
                 <a:cs typeface="Arial" panose="020B0604020202020204" pitchFamily="34" charset="0"/>
               </a:rPr>
@@ -3551,8 +3556,8 @@
         </p:nvSpPr>
         <p:spPr>
           <a:xfrm>
-            <a:off x="1976390" y="0"/>
-            <a:ext cx="247184" cy="215444"/>
+            <a:off x="3800750" y="513382"/>
+            <a:ext cx="304892" cy="329001"/>
           </a:xfrm>
           <a:prstGeom prst="rect">
             <a:avLst/>
@@ -3566,7 +3571,7 @@
           <a:lstStyle/>
           <a:p>
             <a:r>
-              <a:rPr lang="en-US" sz="800" b="1" dirty="0">
+              <a:rPr lang="en-US" sz="1538" b="1" dirty="0">
                 <a:latin typeface="Arial" panose="020B0604020202020204" pitchFamily="34" charset="0"/>
                 <a:cs typeface="Arial" panose="020B0604020202020204" pitchFamily="34" charset="0"/>
               </a:rPr>
@@ -3589,8 +3594,8 @@
         </p:nvSpPr>
         <p:spPr>
           <a:xfrm>
-            <a:off x="3967210" y="0"/>
-            <a:ext cx="242374" cy="215444"/>
+            <a:off x="7629250" y="513382"/>
+            <a:ext cx="293670" cy="329001"/>
           </a:xfrm>
           <a:prstGeom prst="rect">
             <a:avLst/>
@@ -3604,11 +3609,49 @@
           <a:lstStyle/>
           <a:p>
             <a:r>
-              <a:rPr lang="en-US" sz="800" b="1" dirty="0">
+              <a:rPr lang="en-US" sz="1538" b="1" dirty="0">
                 <a:latin typeface="Arial" panose="020B0604020202020204" pitchFamily="34" charset="0"/>
                 <a:cs typeface="Arial" panose="020B0604020202020204" pitchFamily="34" charset="0"/>
               </a:rPr>
               <a:t>c</a:t>
+            </a:r>
+          </a:p>
+        </p:txBody>
+      </p:sp>
+      <p:sp>
+        <p:nvSpPr>
+          <p:cNvPr id="2" name="TextBox 1">
+            <a:extLst>
+              <a:ext uri="{FF2B5EF4-FFF2-40B4-BE49-F238E27FC236}">
+                <a16:creationId xmlns:a16="http://schemas.microsoft.com/office/drawing/2014/main" id="{91604865-3997-702F-655A-F30BAB5D2F4C}"/>
+              </a:ext>
+            </a:extLst>
+          </p:cNvPr>
+          <p:cNvSpPr txBox="1"/>
+          <p:nvPr/>
+        </p:nvSpPr>
+        <p:spPr>
+          <a:xfrm>
+            <a:off x="-26929" y="-19309"/>
+            <a:ext cx="1271502" cy="447495"/>
+          </a:xfrm>
+          <a:prstGeom prst="rect">
+            <a:avLst/>
+          </a:prstGeom>
+          <a:noFill/>
+        </p:spPr>
+        <p:txBody>
+          <a:bodyPr wrap="none" rtlCol="0">
+            <a:spAutoFit/>
+          </a:bodyPr>
+          <a:lstStyle/>
+          <a:p>
+            <a:r>
+              <a:rPr lang="en-US" sz="2308" dirty="0">
+                <a:latin typeface="Arial" panose="020B0604020202020204" pitchFamily="34" charset="0"/>
+                <a:cs typeface="Arial" panose="020B0604020202020204" pitchFamily="34" charset="0"/>
+              </a:rPr>
+              <a:t>Figure 3</a:t>
             </a:r>
           </a:p>
         </p:txBody>
